--- a/exports/pptx/lessons/middle-module-13-indic-ecology/day-06-prithivi-sukta.pptx
+++ b/exports/pptx/lessons/middle-module-13-indic-ecology/day-06-prithivi-sukta.pptx
@@ -6166,8 +6166,8 @@
         </p:nvSpPr>
         <p:spPr>
           <a:xfrm>
-            <a:off x="406301" y="6757690"/>
-            <a:ext cx="8498026" cy="426541"/>
+            <a:off x="406301" y="5329535"/>
+            <a:ext cx="8498026" cy="213271"/>
           </a:xfrm>
           <a:prstGeom prst="rect">
             <a:avLst/>
@@ -6200,30 +6200,7 @@
                 <a:ea typeface="Arial" pitchFamily="34" charset="-122"/>
                 <a:cs typeface="Arial" pitchFamily="34" charset="-120"/>
               </a:rPr>
-              <a:t>The first kind of claim is not better or worse than the second. It does different work.</a:t>
-            </a:r>
-            <a:pPr algn="l" indent="0" marL="0">
-              <a:lnSpc>
-                <a:spcPts val="1680"/>
-              </a:lnSpc>
-              <a:spcBef>
-                <a:spcPts val="300"/>
-              </a:spcBef>
-              <a:spcAft>
-                <a:spcPts val="300"/>
-              </a:spcAft>
-              <a:buNone/>
-            </a:pPr>
-            <a:r>
-              <a:rPr lang="en-US" sz="1200" dirty="0">
-                <a:solidFill>
-                  <a:srgbClr val="1C2833"/>
-                </a:solidFill>
-                <a:latin typeface="Arial" pitchFamily="34" charset="0"/>
-                <a:ea typeface="Arial" pitchFamily="34" charset="-122"/>
-                <a:cs typeface="Arial" pitchFamily="34" charset="-120"/>
-              </a:rPr>
-              <a:t> The first shapes your attitude. The second checks whether you actually behaved well.</a:t>
+              <a:t>Each row: Claim · Type · How you'd test it.</a:t>
             </a:r>
             <a:endParaRPr lang="en-US" sz="1200" dirty="0"/>
           </a:p>
@@ -6237,8 +6214,8 @@
         </p:nvSpPr>
         <p:spPr>
           <a:xfrm>
-            <a:off x="634901" y="7273082"/>
-            <a:ext cx="8102798" cy="487561"/>
+            <a:off x="634901" y="5631656"/>
+            <a:ext cx="8102798" cy="1218902"/>
           </a:xfrm>
           <a:prstGeom prst="rect">
             <a:avLst/>
@@ -6269,7 +6246,7 @@
                 <a:ea typeface="Arial" pitchFamily="34" charset="-122"/>
                 <a:cs typeface="Arial" pitchFamily="34" charset="-120"/>
               </a:rPr>
-              <a:t>Why this hymn matters now.</a:t>
+              <a:t>"Earth is the mother."</a:t>
             </a:r>
             <a:pPr algn="l" indent="0" marL="0">
               <a:lnSpc>
@@ -6289,7 +6266,139 @@
                 <a:ea typeface="Arial" pitchFamily="34" charset="-122"/>
                 <a:cs typeface="Arial" pitchFamily="34" charset="-120"/>
               </a:rPr>
-              <a:t> AV 12.1 is sometimes called the world's first comprehensive ecological hymn. That's a bold claim — but the verse structure does cover:</a:t>
+              <a:t> — Spiritual / ethical · You don't test it. It's a stance.</a:t>
+            </a:r>
+            <a:endParaRPr lang="en-US" sz="1200" dirty="0"/>
+          </a:p>
+          <a:p>
+            <a:pPr algn="l" marL="342900" indent="-342900">
+              <a:lnSpc>
+                <a:spcPts val="1620"/>
+              </a:lnSpc>
+              <a:spcAft>
+                <a:spcPts val="300"/>
+              </a:spcAft>
+              <a:buSzPct val="100000"/>
+              <a:buChar char="•"/>
+            </a:pPr>
+            <a:r>
+              <a:rPr lang="en-US" sz="1200" b="1" dirty="0">
+                <a:solidFill>
+                  <a:srgbClr val="1C2833"/>
+                </a:solidFill>
+                <a:latin typeface="Arial" pitchFamily="34" charset="0"/>
+                <a:ea typeface="Arial" pitchFamily="34" charset="-122"/>
+                <a:cs typeface="Arial" pitchFamily="34" charset="-120"/>
+              </a:rPr>
+              <a:t>"Soil takes 100–1000 years to form 1 cm."</a:t>
+            </a:r>
+            <a:pPr algn="l" indent="0" marL="0">
+              <a:lnSpc>
+                <a:spcPts val="1620"/>
+              </a:lnSpc>
+              <a:spcAft>
+                <a:spcPts val="300"/>
+              </a:spcAft>
+              <a:buNone/>
+            </a:pPr>
+            <a:r>
+              <a:rPr lang="en-US" sz="1200" dirty="0">
+                <a:solidFill>
+                  <a:srgbClr val="1C2833"/>
+                </a:solidFill>
+                <a:latin typeface="Arial" pitchFamily="34" charset="0"/>
+                <a:ea typeface="Arial" pitchFamily="34" charset="-122"/>
+                <a:cs typeface="Arial" pitchFamily="34" charset="-120"/>
+              </a:rPr>
+              <a:t> — Empirical · Soil-science measurement.</a:t>
+            </a:r>
+            <a:endParaRPr lang="en-US" sz="1200" dirty="0"/>
+          </a:p>
+          <a:p>
+            <a:pPr algn="l" marL="342900" indent="-342900">
+              <a:lnSpc>
+                <a:spcPts val="1620"/>
+              </a:lnSpc>
+              <a:spcAft>
+                <a:spcPts val="300"/>
+              </a:spcAft>
+              <a:buSzPct val="100000"/>
+              <a:buChar char="•"/>
+            </a:pPr>
+            <a:r>
+              <a:rPr lang="en-US" sz="1200" b="1" dirty="0">
+                <a:solidFill>
+                  <a:srgbClr val="1C2833"/>
+                </a:solidFill>
+                <a:latin typeface="Arial" pitchFamily="34" charset="0"/>
+                <a:ea typeface="Arial" pitchFamily="34" charset="-122"/>
+                <a:cs typeface="Arial" pitchFamily="34" charset="-120"/>
+              </a:rPr>
+              <a:t>"Whatever I dig from Earth, may it grow back."</a:t>
+            </a:r>
+            <a:pPr algn="l" indent="0" marL="0">
+              <a:lnSpc>
+                <a:spcPts val="1620"/>
+              </a:lnSpc>
+              <a:spcAft>
+                <a:spcPts val="300"/>
+              </a:spcAft>
+              <a:buNone/>
+            </a:pPr>
+            <a:r>
+              <a:rPr lang="en-US" sz="1200" dirty="0">
+                <a:solidFill>
+                  <a:srgbClr val="1C2833"/>
+                </a:solidFill>
+                <a:latin typeface="Arial" pitchFamily="34" charset="0"/>
+                <a:ea typeface="Arial" pitchFamily="34" charset="-122"/>
+                <a:cs typeface="Arial" pitchFamily="34" charset="-120"/>
+              </a:rPr>
+              <a:t> — Ethical (with an empirical implication) · Implies a sustainability check.</a:t>
+            </a:r>
+            <a:endParaRPr lang="en-US" sz="1200" dirty="0"/>
+          </a:p>
+          <a:p>
+            <a:pPr algn="l" marL="342900" indent="-342900">
+              <a:lnSpc>
+                <a:spcPts val="1620"/>
+              </a:lnSpc>
+              <a:spcAft>
+                <a:spcPts val="300"/>
+              </a:spcAft>
+              <a:buSzPct val="100000"/>
+              <a:buChar char="•"/>
+            </a:pPr>
+            <a:r>
+              <a:rPr lang="en-US" sz="1200" b="1" dirty="0">
+                <a:solidFill>
+                  <a:srgbClr val="1C2833"/>
+                </a:solidFill>
+                <a:latin typeface="Arial" pitchFamily="34" charset="0"/>
+                <a:ea typeface="Arial" pitchFamily="34" charset="-122"/>
+                <a:cs typeface="Arial" pitchFamily="34" charset="-120"/>
+              </a:rPr>
+              <a:t>"I should not strike Earth's vitals."</a:t>
+            </a:r>
+            <a:pPr algn="l" indent="0" marL="0">
+              <a:lnSpc>
+                <a:spcPts val="1620"/>
+              </a:lnSpc>
+              <a:spcAft>
+                <a:spcPts val="300"/>
+              </a:spcAft>
+              <a:buNone/>
+            </a:pPr>
+            <a:r>
+              <a:rPr lang="en-US" sz="1200" dirty="0">
+                <a:solidFill>
+                  <a:srgbClr val="1C2833"/>
+                </a:solidFill>
+                <a:latin typeface="Arial" pitchFamily="34" charset="0"/>
+                <a:ea typeface="Arial" pitchFamily="34" charset="-122"/>
+                <a:cs typeface="Arial" pitchFamily="34" charset="-120"/>
+              </a:rPr>
+              <a:t> — Ethical · Implies don't mine recklessly.</a:t>
             </a:r>
             <a:endParaRPr lang="en-US" sz="1200" dirty="0"/>
           </a:p>
@@ -6303,7 +6412,7 @@
         </p:nvSpPr>
         <p:spPr>
           <a:xfrm>
-            <a:off x="406301" y="7849493"/>
+            <a:off x="406301" y="6939409"/>
             <a:ext cx="8498026" cy="426541"/>
           </a:xfrm>
           <a:prstGeom prst="rect">
@@ -6329,6 +6438,29 @@
               <a:buNone/>
             </a:pPr>
             <a:r>
+              <a:rPr lang="en-US" sz="1200" i="1" dirty="0">
+                <a:solidFill>
+                  <a:srgbClr val="1C2833"/>
+                </a:solidFill>
+                <a:latin typeface="Arial" pitchFamily="34" charset="0"/>
+                <a:ea typeface="Arial" pitchFamily="34" charset="-122"/>
+                <a:cs typeface="Arial" pitchFamily="34" charset="-120"/>
+              </a:rPr>
+              <a:t>The first kind of claim is not better or worse than the second. It does different work.</a:t>
+            </a:r>
+            <a:pPr algn="l" indent="0" marL="0">
+              <a:lnSpc>
+                <a:spcPts val="1680"/>
+              </a:lnSpc>
+              <a:spcBef>
+                <a:spcPts val="300"/>
+              </a:spcBef>
+              <a:spcAft>
+                <a:spcPts val="300"/>
+              </a:spcAft>
+              <a:buNone/>
+            </a:pPr>
+            <a:r>
               <a:rPr lang="en-US" sz="1200" dirty="0">
                 <a:solidFill>
                   <a:srgbClr val="1C2833"/>
@@ -6337,7 +6469,7 @@
                 <a:ea typeface="Arial" pitchFamily="34" charset="-122"/>
                 <a:cs typeface="Arial" pitchFamily="34" charset="-120"/>
               </a:rPr>
-              <a:t>– Earth as living (mother).    – Reciprocity (give back what you dug).    – Sacred limits (don't strike vitals).    – Sustenance via abstract principles (truth, order).</a:t>
+              <a:t> The first shapes your attitude. The second checks whether you actually behaved well.</a:t>
             </a:r>
             <a:endParaRPr lang="en-US" sz="1200" dirty="0"/>
           </a:p>
@@ -6351,8 +6483,8 @@
         </p:nvSpPr>
         <p:spPr>
           <a:xfrm>
-            <a:off x="406301" y="8352234"/>
-            <a:ext cx="8498026" cy="426541"/>
+            <a:off x="634901" y="7454801"/>
+            <a:ext cx="8102798" cy="487561"/>
           </a:xfrm>
           <a:prstGeom prst="rect">
             <a:avLst/>
@@ -6364,13 +6496,31 @@
           <a:bodyPr wrap="square" lIns="0" tIns="0" rIns="0" bIns="0" rtlCol="0" anchor="t"/>
           <a:lstStyle/>
           <a:p>
-            <a:pPr algn="l" indent="0" marL="0">
-              <a:lnSpc>
-                <a:spcPts val="1680"/>
-              </a:lnSpc>
-              <a:spcBef>
-                <a:spcPts val="300"/>
-              </a:spcBef>
+            <a:pPr algn="l" marL="342900" indent="-342900">
+              <a:lnSpc>
+                <a:spcPts val="1620"/>
+              </a:lnSpc>
+              <a:spcAft>
+                <a:spcPts val="300"/>
+              </a:spcAft>
+              <a:buSzPct val="100000"/>
+              <a:buChar char="•"/>
+            </a:pPr>
+            <a:r>
+              <a:rPr lang="en-US" sz="1200" b="1" dirty="0">
+                <a:solidFill>
+                  <a:srgbClr val="1C2833"/>
+                </a:solidFill>
+                <a:latin typeface="Arial" pitchFamily="34" charset="0"/>
+                <a:ea typeface="Arial" pitchFamily="34" charset="-122"/>
+                <a:cs typeface="Arial" pitchFamily="34" charset="-120"/>
+              </a:rPr>
+              <a:t>Why this hymn matters now.</a:t>
+            </a:r>
+            <a:pPr algn="l" indent="0" marL="0">
+              <a:lnSpc>
+                <a:spcPts val="1620"/>
+              </a:lnSpc>
               <a:spcAft>
                 <a:spcPts val="300"/>
               </a:spcAft>
@@ -6385,7 +6535,7 @@
                 <a:ea typeface="Arial" pitchFamily="34" charset="-122"/>
                 <a:cs typeface="Arial" pitchFamily="34" charset="-120"/>
               </a:rPr>
-              <a:t>This is unusual for any tradition's earliest texts. Pre-modern poetry typically extracts; this hymn asks for permission and asks for forgiveness.</a:t>
+              <a:t> AV 12.1 is sometimes called the world's first comprehensive ecological hymn. That's a bold claim — but the verse structure does cover:</a:t>
             </a:r>
             <a:endParaRPr lang="en-US" sz="1200" dirty="0"/>
           </a:p>
@@ -6399,7 +6549,103 @@
         </p:nvSpPr>
         <p:spPr>
           <a:xfrm>
-            <a:off x="406301" y="8931176"/>
+            <a:off x="406301" y="8031212"/>
+            <a:ext cx="8498026" cy="426541"/>
+          </a:xfrm>
+          <a:prstGeom prst="rect">
+            <a:avLst/>
+          </a:prstGeom>
+          <a:noFill/>
+          <a:ln/>
+        </p:spPr>
+        <p:txBody>
+          <a:bodyPr wrap="square" lIns="0" tIns="0" rIns="0" bIns="0" rtlCol="0" anchor="t"/>
+          <a:lstStyle/>
+          <a:p>
+            <a:pPr algn="l" indent="0" marL="0">
+              <a:lnSpc>
+                <a:spcPts val="1680"/>
+              </a:lnSpc>
+              <a:spcBef>
+                <a:spcPts val="300"/>
+              </a:spcBef>
+              <a:spcAft>
+                <a:spcPts val="300"/>
+              </a:spcAft>
+              <a:buNone/>
+            </a:pPr>
+            <a:r>
+              <a:rPr lang="en-US" sz="1200" dirty="0">
+                <a:solidFill>
+                  <a:srgbClr val="1C2833"/>
+                </a:solidFill>
+                <a:latin typeface="Arial" pitchFamily="34" charset="0"/>
+                <a:ea typeface="Arial" pitchFamily="34" charset="-122"/>
+                <a:cs typeface="Arial" pitchFamily="34" charset="-120"/>
+              </a:rPr>
+              <a:t>– Earth as living (mother).    – Reciprocity (give back what you dug).    – Sacred limits (don't strike vitals).    – Sustenance via abstract principles (truth, order).</a:t>
+            </a:r>
+            <a:endParaRPr lang="en-US" sz="1200" dirty="0"/>
+          </a:p>
+        </p:txBody>
+      </p:sp>
+      <p:sp>
+        <p:nvSpPr>
+          <p:cNvPr id="18" name="Text 16"/>
+          <p:cNvSpPr/>
+          <p:nvPr/>
+        </p:nvSpPr>
+        <p:spPr>
+          <a:xfrm>
+            <a:off x="406301" y="8533954"/>
+            <a:ext cx="8498026" cy="426541"/>
+          </a:xfrm>
+          <a:prstGeom prst="rect">
+            <a:avLst/>
+          </a:prstGeom>
+          <a:noFill/>
+          <a:ln/>
+        </p:spPr>
+        <p:txBody>
+          <a:bodyPr wrap="square" lIns="0" tIns="0" rIns="0" bIns="0" rtlCol="0" anchor="t"/>
+          <a:lstStyle/>
+          <a:p>
+            <a:pPr algn="l" indent="0" marL="0">
+              <a:lnSpc>
+                <a:spcPts val="1680"/>
+              </a:lnSpc>
+              <a:spcBef>
+                <a:spcPts val="300"/>
+              </a:spcBef>
+              <a:spcAft>
+                <a:spcPts val="300"/>
+              </a:spcAft>
+              <a:buNone/>
+            </a:pPr>
+            <a:r>
+              <a:rPr lang="en-US" sz="1200" dirty="0">
+                <a:solidFill>
+                  <a:srgbClr val="1C2833"/>
+                </a:solidFill>
+                <a:latin typeface="Arial" pitchFamily="34" charset="0"/>
+                <a:ea typeface="Arial" pitchFamily="34" charset="-122"/>
+                <a:cs typeface="Arial" pitchFamily="34" charset="-120"/>
+              </a:rPr>
+              <a:t>This is unusual for any tradition's earliest texts. Pre-modern poetry typically extracts; this hymn asks for permission and asks for forgiveness.</a:t>
+            </a:r>
+            <a:endParaRPr lang="en-US" sz="1200" dirty="0"/>
+          </a:p>
+        </p:txBody>
+      </p:sp>
+      <p:sp>
+        <p:nvSpPr>
+          <p:cNvPr id="19" name="Text 17"/>
+          <p:cNvSpPr/>
+          <p:nvPr/>
+        </p:nvSpPr>
+        <p:spPr>
+          <a:xfrm>
+            <a:off x="406301" y="9112895"/>
             <a:ext cx="8498026" cy="213271"/>
           </a:xfrm>
           <a:prstGeom prst="rect">
@@ -6605,8 +6851,8 @@
         </p:nvSpPr>
         <p:spPr>
           <a:xfrm>
-            <a:off x="406301" y="2893368"/>
-            <a:ext cx="8498026" cy="426541"/>
+            <a:off x="406301" y="1160413"/>
+            <a:ext cx="8498026" cy="213271"/>
           </a:xfrm>
           <a:prstGeom prst="rect">
             <a:avLst/>
@@ -6631,6 +6877,72 @@
               <a:buNone/>
             </a:pPr>
             <a:r>
+              <a:rPr lang="en-US" sz="1200" i="1" dirty="0">
+                <a:solidFill>
+                  <a:srgbClr val="1C2833"/>
+                </a:solidFill>
+                <a:latin typeface="Arial" pitchFamily="34" charset="0"/>
+                <a:ea typeface="Arial" pitchFamily="34" charset="-122"/>
+                <a:cs typeface="Arial" pitchFamily="34" charset="-120"/>
+              </a:rPr>
+              <a:t>Each row: Verse / image · What modern observation is this in line with?.</a:t>
+            </a:r>
+            <a:endParaRPr lang="en-US" sz="1200" dirty="0"/>
+          </a:p>
+        </p:txBody>
+      </p:sp>
+      <p:sp>
+        <p:nvSpPr>
+          <p:cNvPr id="6" name="Text 4"/>
+          <p:cNvSpPr/>
+          <p:nvPr/>
+        </p:nvSpPr>
+        <p:spPr>
+          <a:xfrm>
+            <a:off x="634901" y="1462534"/>
+            <a:ext cx="8102798" cy="1424583"/>
+          </a:xfrm>
+          <a:prstGeom prst="rect">
+            <a:avLst/>
+          </a:prstGeom>
+          <a:noFill/>
+          <a:ln/>
+        </p:spPr>
+        <p:txBody>
+          <a:bodyPr wrap="square" lIns="0" tIns="0" rIns="0" bIns="0" rtlCol="0" anchor="t"/>
+          <a:lstStyle/>
+          <a:p>
+            <a:pPr algn="l" marL="342900" indent="-342900">
+              <a:lnSpc>
+                <a:spcPts val="1620"/>
+              </a:lnSpc>
+              <a:spcAft>
+                <a:spcPts val="300"/>
+              </a:spcAft>
+              <a:buSzPct val="100000"/>
+              <a:buChar char="•"/>
+            </a:pPr>
+            <a:r>
+              <a:rPr lang="en-US" sz="1200" b="1" dirty="0">
+                <a:solidFill>
+                  <a:srgbClr val="1C2833"/>
+                </a:solidFill>
+                <a:latin typeface="Arial" pitchFamily="34" charset="0"/>
+                <a:ea typeface="Arial" pitchFamily="34" charset="-122"/>
+                <a:cs typeface="Arial" pitchFamily="34" charset="-120"/>
+              </a:rPr>
+              <a:t>"Mother who supports us"</a:t>
+            </a:r>
+            <a:pPr algn="l" indent="0" marL="0">
+              <a:lnSpc>
+                <a:spcPts val="1620"/>
+              </a:lnSpc>
+              <a:spcAft>
+                <a:spcPts val="300"/>
+              </a:spcAft>
+              <a:buNone/>
+            </a:pPr>
+            <a:r>
               <a:rPr lang="en-US" sz="1200" dirty="0">
                 <a:solidFill>
                   <a:srgbClr val="1C2833"/>
@@ -6639,6 +6951,186 @@
                 <a:ea typeface="Arial" pitchFamily="34" charset="-122"/>
                 <a:cs typeface="Arial" pitchFamily="34" charset="-120"/>
               </a:rPr>
+              <a:t> — Soil supports food chains; the biosphere supports all life.</a:t>
+            </a:r>
+            <a:endParaRPr lang="en-US" sz="1200" dirty="0"/>
+          </a:p>
+          <a:p>
+            <a:pPr algn="l" marL="342900" indent="-342900">
+              <a:lnSpc>
+                <a:spcPts val="1620"/>
+              </a:lnSpc>
+              <a:spcAft>
+                <a:spcPts val="300"/>
+              </a:spcAft>
+              <a:buSzPct val="100000"/>
+              <a:buChar char="•"/>
+            </a:pPr>
+            <a:r>
+              <a:rPr lang="en-US" sz="1200" b="1" dirty="0">
+                <a:solidFill>
+                  <a:srgbClr val="1C2833"/>
+                </a:solidFill>
+                <a:latin typeface="Arial" pitchFamily="34" charset="0"/>
+                <a:ea typeface="Arial" pitchFamily="34" charset="-122"/>
+                <a:cs typeface="Arial" pitchFamily="34" charset="-120"/>
+              </a:rPr>
+              <a:t>"May what I dig grow back"</a:t>
+            </a:r>
+            <a:pPr algn="l" indent="0" marL="0">
+              <a:lnSpc>
+                <a:spcPts val="1620"/>
+              </a:lnSpc>
+              <a:spcAft>
+                <a:spcPts val="300"/>
+              </a:spcAft>
+              <a:buNone/>
+            </a:pPr>
+            <a:r>
+              <a:rPr lang="en-US" sz="1200" dirty="0">
+                <a:solidFill>
+                  <a:srgbClr val="1C2833"/>
+                </a:solidFill>
+                <a:latin typeface="Arial" pitchFamily="34" charset="0"/>
+                <a:ea typeface="Arial" pitchFamily="34" charset="-122"/>
+                <a:cs typeface="Arial" pitchFamily="34" charset="-120"/>
+              </a:rPr>
+              <a:t> — Renewable extraction limits; sustainability.</a:t>
+            </a:r>
+            <a:endParaRPr lang="en-US" sz="1200" dirty="0"/>
+          </a:p>
+          <a:p>
+            <a:pPr algn="l" marL="342900" indent="-342900">
+              <a:lnSpc>
+                <a:spcPts val="1620"/>
+              </a:lnSpc>
+              <a:spcAft>
+                <a:spcPts val="300"/>
+              </a:spcAft>
+              <a:buSzPct val="100000"/>
+              <a:buChar char="•"/>
+            </a:pPr>
+            <a:r>
+              <a:rPr lang="en-US" sz="1200" b="1" dirty="0">
+                <a:solidFill>
+                  <a:srgbClr val="1C2833"/>
+                </a:solidFill>
+                <a:latin typeface="Arial" pitchFamily="34" charset="0"/>
+                <a:ea typeface="Arial" pitchFamily="34" charset="-122"/>
+                <a:cs typeface="Arial" pitchFamily="34" charset="-120"/>
+              </a:rPr>
+              <a:t>"Don't strike Earth's vitals"</a:t>
+            </a:r>
+            <a:pPr algn="l" indent="0" marL="0">
+              <a:lnSpc>
+                <a:spcPts val="1620"/>
+              </a:lnSpc>
+              <a:spcAft>
+                <a:spcPts val="300"/>
+              </a:spcAft>
+              <a:buNone/>
+            </a:pPr>
+            <a:r>
+              <a:rPr lang="en-US" sz="1200" dirty="0">
+                <a:solidFill>
+                  <a:srgbClr val="1C2833"/>
+                </a:solidFill>
+                <a:latin typeface="Arial" pitchFamily="34" charset="0"/>
+                <a:ea typeface="Arial" pitchFamily="34" charset="-122"/>
+                <a:cs typeface="Arial" pitchFamily="34" charset="-120"/>
+              </a:rPr>
+              <a:t> — Don't destroy groundwater aquifers; don't damage the ozone layer; don't push past climate tipping points.</a:t>
+            </a:r>
+            <a:endParaRPr lang="en-US" sz="1200" dirty="0"/>
+          </a:p>
+          <a:p>
+            <a:pPr algn="l" marL="342900" indent="-342900">
+              <a:lnSpc>
+                <a:spcPts val="1620"/>
+              </a:lnSpc>
+              <a:spcAft>
+                <a:spcPts val="300"/>
+              </a:spcAft>
+              <a:buSzPct val="100000"/>
+              <a:buChar char="•"/>
+            </a:pPr>
+            <a:r>
+              <a:rPr lang="en-US" sz="1200" b="1" dirty="0">
+                <a:solidFill>
+                  <a:srgbClr val="1C2833"/>
+                </a:solidFill>
+                <a:latin typeface="Arial" pitchFamily="34" charset="0"/>
+                <a:ea typeface="Arial" pitchFamily="34" charset="-122"/>
+                <a:cs typeface="Arial" pitchFamily="34" charset="-120"/>
+              </a:rPr>
+              <a:t>"Earth is the support of truth, order, discipline"</a:t>
+            </a:r>
+            <a:pPr algn="l" indent="0" marL="0">
+              <a:lnSpc>
+                <a:spcPts val="1620"/>
+              </a:lnSpc>
+              <a:spcAft>
+                <a:spcPts val="300"/>
+              </a:spcAft>
+              <a:buNone/>
+            </a:pPr>
+            <a:r>
+              <a:rPr lang="en-US" sz="1200" dirty="0">
+                <a:solidFill>
+                  <a:srgbClr val="1C2833"/>
+                </a:solidFill>
+                <a:latin typeface="Arial" pitchFamily="34" charset="0"/>
+                <a:ea typeface="Arial" pitchFamily="34" charset="-122"/>
+                <a:cs typeface="Arial" pitchFamily="34" charset="-120"/>
+              </a:rPr>
+              <a:t> — The biosphere is the precondition for any human civilization, including science.</a:t>
+            </a:r>
+            <a:endParaRPr lang="en-US" sz="1200" dirty="0"/>
+          </a:p>
+        </p:txBody>
+      </p:sp>
+      <p:sp>
+        <p:nvSpPr>
+          <p:cNvPr id="7" name="Text 5"/>
+          <p:cNvSpPr/>
+          <p:nvPr/>
+        </p:nvSpPr>
+        <p:spPr>
+          <a:xfrm>
+            <a:off x="406301" y="2975967"/>
+            <a:ext cx="8498026" cy="426541"/>
+          </a:xfrm>
+          <a:prstGeom prst="rect">
+            <a:avLst/>
+          </a:prstGeom>
+          <a:noFill/>
+          <a:ln/>
+        </p:spPr>
+        <p:txBody>
+          <a:bodyPr wrap="square" lIns="0" tIns="0" rIns="0" bIns="0" rtlCol="0" anchor="t"/>
+          <a:lstStyle/>
+          <a:p>
+            <a:pPr algn="l" indent="0" marL="0">
+              <a:lnSpc>
+                <a:spcPts val="1680"/>
+              </a:lnSpc>
+              <a:spcBef>
+                <a:spcPts val="300"/>
+              </a:spcBef>
+              <a:spcAft>
+                <a:spcPts val="300"/>
+              </a:spcAft>
+              <a:buNone/>
+            </a:pPr>
+            <a:r>
+              <a:rPr lang="en-US" sz="1200" dirty="0">
+                <a:solidFill>
+                  <a:srgbClr val="1C2833"/>
+                </a:solidFill>
+                <a:latin typeface="Arial" pitchFamily="34" charset="0"/>
+                <a:ea typeface="Arial" pitchFamily="34" charset="-122"/>
+                <a:cs typeface="Arial" pitchFamily="34" charset="-120"/>
+              </a:rPr>
               <a:t>– The point is </a:t>
             </a:r>
             <a:pPr algn="l" indent="0" marL="0">
@@ -6693,7 +7185,7 @@
       </p:sp>
       <p:sp>
         <p:nvSpPr>
-          <p:cNvPr id="6" name="Text 4"/>
+          <p:cNvPr id="8" name="Text 6"/>
           <p:cNvSpPr/>
           <p:nvPr/>
         </p:nvSpPr>
